--- a/src/ppt-super/assets/tpl-11-four-cards/template.pptx
+++ b/src/ppt-super/assets/tpl-11-four-cards/template.pptx
@@ -3136,7 +3136,14 @@
           <a:bodyPr rtlCol="0" anchor="ctr"/>
           <a:lstStyle/>
           <a:p>
-            <a:pPr algn="ctr"/>
+            <a:pPr algn="ctr">
+              <a:spcBef>
+                <a:spcPts val="0"/>
+              </a:spcBef>
+              <a:spcAft>
+                <a:spcPts val="0"/>
+              </a:spcAft>
+            </a:pPr>
           </a:p>
         </p:txBody>
       </p:sp>
@@ -3166,14 +3173,21 @@
               <a:lnSpc>
                 <a:spcPct val="112000"/>
               </a:lnSpc>
+              <a:spcBef>
+                <a:spcPts val="0"/>
+              </a:spcBef>
+              <a:spcAft>
+                <a:spcPts val="0"/>
+              </a:spcAft>
             </a:pPr>
             <a:r>
-              <a:rPr sz="1400" b="1" i="0">
+              <a:rPr sz="1400" b="1" i="0" lang="zh-CN" altLang="zh-CN">
                 <a:solidFill>
                   <a:srgbClr val="FFFFFF"/>
                 </a:solidFill>
                 <a:latin typeface="Microsoft YaHei"/>
                 <a:ea typeface="Microsoft YaHei"/>
+                <a:cs typeface="Microsoft YaHei"/>
               </a:rPr>
               <a:t>昇腾算力</a:t>
             </a:r>
@@ -3206,14 +3220,21 @@
               <a:lnSpc>
                 <a:spcPct val="112000"/>
               </a:lnSpc>
+              <a:spcBef>
+                <a:spcPts val="0"/>
+              </a:spcBef>
+              <a:spcAft>
+                <a:spcPts val="0"/>
+              </a:spcAft>
             </a:pPr>
             <a:r>
-              <a:rPr sz="2200" b="1" i="0">
+              <a:rPr sz="2200" b="1" i="0" lang="zh-CN" altLang="zh-CN">
                 <a:solidFill>
                   <a:srgbClr val="B90A0A"/>
                 </a:solidFill>
                 <a:latin typeface="Microsoft YaHei"/>
                 <a:ea typeface="Microsoft YaHei"/>
+                <a:cs typeface="Microsoft YaHei"/>
               </a:rPr>
               <a:t>昇腾 AI 平台四大核心能力: 大模型训练效率提升 45%, 自主可控率 100%</a:t>
             </a:r>
@@ -3300,7 +3321,14 @@
           <a:bodyPr rtlCol="0" anchor="ctr"/>
           <a:lstStyle/>
           <a:p>
-            <a:pPr algn="ctr"/>
+            <a:pPr algn="ctr">
+              <a:spcBef>
+                <a:spcPts val="0"/>
+              </a:spcBef>
+              <a:spcAft>
+                <a:spcPts val="0"/>
+              </a:spcAft>
+            </a:pPr>
           </a:p>
         </p:txBody>
       </p:sp>
@@ -3344,7 +3372,14 @@
           <a:bodyPr rtlCol="0" anchor="ctr"/>
           <a:lstStyle/>
           <a:p>
-            <a:pPr algn="ctr"/>
+            <a:pPr algn="ctr">
+              <a:spcBef>
+                <a:spcPts val="0"/>
+              </a:spcBef>
+              <a:spcAft>
+                <a:spcPts val="0"/>
+              </a:spcAft>
+            </a:pPr>
           </a:p>
         </p:txBody>
       </p:sp>
@@ -3388,7 +3423,14 @@
           <a:bodyPr rtlCol="0" anchor="ctr"/>
           <a:lstStyle/>
           <a:p>
-            <a:pPr algn="ctr"/>
+            <a:pPr algn="ctr">
+              <a:spcBef>
+                <a:spcPts val="0"/>
+              </a:spcBef>
+              <a:spcAft>
+                <a:spcPts val="0"/>
+              </a:spcAft>
+            </a:pPr>
           </a:p>
         </p:txBody>
       </p:sp>
@@ -3418,14 +3460,21 @@
               <a:lnSpc>
                 <a:spcPct val="112000"/>
               </a:lnSpc>
+              <a:spcBef>
+                <a:spcPts val="0"/>
+              </a:spcBef>
+              <a:spcAft>
+                <a:spcPts val="0"/>
+              </a:spcAft>
             </a:pPr>
             <a:r>
-              <a:rPr sz="1600" b="1" i="0">
+              <a:rPr sz="1600" b="1" i="0" lang="zh-CN" altLang="zh-CN">
                 <a:solidFill>
                   <a:srgbClr val="FFFFFF"/>
                 </a:solidFill>
                 <a:latin typeface="Microsoft YaHei"/>
                 <a:ea typeface="Microsoft YaHei"/>
+                <a:cs typeface="Microsoft YaHei"/>
               </a:rPr>
               <a:t>01</a:t>
             </a:r>
@@ -3458,14 +3507,21 @@
               <a:lnSpc>
                 <a:spcPct val="112000"/>
               </a:lnSpc>
+              <a:spcBef>
+                <a:spcPts val="0"/>
+              </a:spcBef>
+              <a:spcAft>
+                <a:spcPts val="0"/>
+              </a:spcAft>
             </a:pPr>
             <a:r>
-              <a:rPr sz="1700" b="1" i="0">
+              <a:rPr sz="1700" b="1" i="0" lang="zh-CN" altLang="zh-CN">
                 <a:solidFill>
                   <a:srgbClr val="262626"/>
                 </a:solidFill>
                 <a:latin typeface="Microsoft YaHei"/>
                 <a:ea typeface="Microsoft YaHei"/>
+                <a:cs typeface="Microsoft YaHei"/>
               </a:rPr>
               <a:t>算力底座</a:t>
             </a:r>
@@ -3498,14 +3554,21 @@
               <a:lnSpc>
                 <a:spcPct val="112000"/>
               </a:lnSpc>
+              <a:spcBef>
+                <a:spcPts val="0"/>
+              </a:spcBef>
+              <a:spcAft>
+                <a:spcPts val="0"/>
+              </a:spcAft>
             </a:pPr>
             <a:r>
-              <a:rPr sz="1050" b="0" i="0">
+              <a:rPr sz="1050" b="0" i="0" lang="zh-CN" altLang="zh-CN">
                 <a:solidFill>
                   <a:srgbClr val="595959"/>
                 </a:solidFill>
                 <a:latin typeface="Microsoft YaHei"/>
                 <a:ea typeface="Microsoft YaHei"/>
+                <a:cs typeface="Microsoft YaHei"/>
               </a:rPr>
               <a:t>昇腾 910B 万卡集群, 澎湃算力供给</a:t>
             </a:r>
@@ -3574,14 +3637,21 @@
               <a:lnSpc>
                 <a:spcPct val="130000"/>
               </a:lnSpc>
+              <a:spcBef>
+                <a:spcPts val="0"/>
+              </a:spcBef>
+              <a:spcAft>
+                <a:spcPts val="0"/>
+              </a:spcAft>
             </a:pPr>
             <a:r>
-              <a:rPr sz="1150" b="0" i="0">
+              <a:rPr sz="1150" b="0" i="0" lang="zh-CN" altLang="zh-CN">
                 <a:solidFill>
                   <a:srgbClr val="262626"/>
                 </a:solidFill>
                 <a:latin typeface="Microsoft YaHei"/>
                 <a:ea typeface="Microsoft YaHei"/>
+                <a:cs typeface="Microsoft YaHei"/>
               </a:rPr>
               <a:t>昇腾 910B 单集群已实现 8192 卡组网, 集群线性度保持在 90% 以上, 算力利用率由 58% 提升至 86%。液冷方案将 PUE 降至 1.12, 整体能耗下降 28%; 断点续训恢复时间小于 10 分钟, 已支撑千卡级长稳训练连续运行 30 天。</a:t>
             </a:r>
@@ -3628,7 +3698,14 @@
           <a:bodyPr rtlCol="0" anchor="ctr"/>
           <a:lstStyle/>
           <a:p>
-            <a:pPr algn="ctr"/>
+            <a:pPr algn="ctr">
+              <a:spcBef>
+                <a:spcPts val="0"/>
+              </a:spcBef>
+              <a:spcAft>
+                <a:spcPts val="0"/>
+              </a:spcAft>
+            </a:pPr>
           </a:p>
         </p:txBody>
       </p:sp>
@@ -3658,14 +3735,21 @@
               <a:lnSpc>
                 <a:spcPct val="112000"/>
               </a:lnSpc>
+              <a:spcBef>
+                <a:spcPts val="0"/>
+              </a:spcBef>
+              <a:spcAft>
+                <a:spcPts val="0"/>
+              </a:spcAft>
             </a:pPr>
             <a:r>
-              <a:rPr sz="1250" b="1" i="0">
+              <a:rPr sz="1250" b="1" i="0" lang="zh-CN" altLang="zh-CN">
                 <a:solidFill>
                   <a:srgbClr val="262626"/>
                 </a:solidFill>
                 <a:latin typeface="Microsoft YaHei"/>
                 <a:ea typeface="Microsoft YaHei"/>
+                <a:cs typeface="Microsoft YaHei"/>
               </a:rPr>
               <a:t>算力利用率 86%</a:t>
             </a:r>
@@ -3698,14 +3782,21 @@
               <a:lnSpc>
                 <a:spcPct val="112000"/>
               </a:lnSpc>
+              <a:spcBef>
+                <a:spcPts val="0"/>
+              </a:spcBef>
+              <a:spcAft>
+                <a:spcPts val="0"/>
+              </a:spcAft>
             </a:pPr>
             <a:r>
-              <a:rPr sz="950" b="0" i="0">
+              <a:rPr sz="950" b="0" i="0" lang="zh-CN" altLang="zh-CN">
                 <a:solidFill>
                   <a:srgbClr val="595959"/>
                 </a:solidFill>
                 <a:latin typeface="Microsoft YaHei"/>
                 <a:ea typeface="Microsoft YaHei"/>
+                <a:cs typeface="Microsoft YaHei"/>
               </a:rPr>
               <a:t>典型局点: 某省智算中心 8192 卡集群</a:t>
             </a:r>
@@ -3752,7 +3843,14 @@
           <a:bodyPr rtlCol="0" anchor="ctr"/>
           <a:lstStyle/>
           <a:p>
-            <a:pPr algn="ctr"/>
+            <a:pPr algn="ctr">
+              <a:spcBef>
+                <a:spcPts val="0"/>
+              </a:spcBef>
+              <a:spcAft>
+                <a:spcPts val="0"/>
+              </a:spcAft>
+            </a:pPr>
           </a:p>
         </p:txBody>
       </p:sp>
@@ -3764,8 +3862,8 @@
         </p:nvSpPr>
         <p:spPr>
           <a:xfrm>
-            <a:off x="596900" y="4776354"/>
-            <a:ext cx="355600" cy="355600"/>
+            <a:off x="517525" y="4674500"/>
+            <a:ext cx="514350" cy="559308"/>
           </a:xfrm>
           <a:prstGeom prst="rect">
             <a:avLst/>
@@ -3782,14 +3880,21 @@
               <a:lnSpc>
                 <a:spcPct val="112000"/>
               </a:lnSpc>
+              <a:spcBef>
+                <a:spcPts val="0"/>
+              </a:spcBef>
+              <a:spcAft>
+                <a:spcPts val="0"/>
+              </a:spcAft>
             </a:pPr>
             <a:r>
-              <a:rPr sz="3400" b="1" i="0">
+              <a:rPr sz="3400" b="1" i="0" lang="zh-CN" altLang="zh-CN">
                 <a:solidFill>
                   <a:srgbClr val="1F4E79"/>
                 </a:solidFill>
                 <a:latin typeface="Microsoft YaHei"/>
                 <a:ea typeface="Microsoft YaHei"/>
+                <a:cs typeface="Microsoft YaHei"/>
               </a:rPr>
               <a:t>⚙</a:t>
             </a:r>
@@ -3822,14 +3927,21 @@
               <a:lnSpc>
                 <a:spcPct val="112000"/>
               </a:lnSpc>
+              <a:spcBef>
+                <a:spcPts val="0"/>
+              </a:spcBef>
+              <a:spcAft>
+                <a:spcPts val="0"/>
+              </a:spcAft>
             </a:pPr>
             <a:r>
-              <a:rPr sz="1000" b="0" i="0">
+              <a:rPr sz="1000" b="0" i="0" lang="zh-CN" altLang="zh-CN">
                 <a:solidFill>
                   <a:srgbClr val="595959"/>
                 </a:solidFill>
                 <a:latin typeface="Microsoft YaHei"/>
                 <a:ea typeface="Microsoft YaHei"/>
+                <a:cs typeface="Microsoft YaHei"/>
               </a:rPr>
               <a:t>智算中心万卡集群分钟级扩容, 训练任务排队时间从小时级降至分钟级</a:t>
             </a:r>
@@ -3916,7 +4028,14 @@
           <a:bodyPr rtlCol="0" anchor="ctr"/>
           <a:lstStyle/>
           <a:p>
-            <a:pPr algn="ctr"/>
+            <a:pPr algn="ctr">
+              <a:spcBef>
+                <a:spcPts val="0"/>
+              </a:spcBef>
+              <a:spcAft>
+                <a:spcPts val="0"/>
+              </a:spcAft>
+            </a:pPr>
           </a:p>
         </p:txBody>
       </p:sp>
@@ -3960,7 +4079,14 @@
           <a:bodyPr rtlCol="0" anchor="ctr"/>
           <a:lstStyle/>
           <a:p>
-            <a:pPr algn="ctr"/>
+            <a:pPr algn="ctr">
+              <a:spcBef>
+                <a:spcPts val="0"/>
+              </a:spcBef>
+              <a:spcAft>
+                <a:spcPts val="0"/>
+              </a:spcAft>
+            </a:pPr>
           </a:p>
         </p:txBody>
       </p:sp>
@@ -4004,7 +4130,14 @@
           <a:bodyPr rtlCol="0" anchor="ctr"/>
           <a:lstStyle/>
           <a:p>
-            <a:pPr algn="ctr"/>
+            <a:pPr algn="ctr">
+              <a:spcBef>
+                <a:spcPts val="0"/>
+              </a:spcBef>
+              <a:spcAft>
+                <a:spcPts val="0"/>
+              </a:spcAft>
+            </a:pPr>
           </a:p>
         </p:txBody>
       </p:sp>
@@ -4034,14 +4167,21 @@
               <a:lnSpc>
                 <a:spcPct val="112000"/>
               </a:lnSpc>
+              <a:spcBef>
+                <a:spcPts val="0"/>
+              </a:spcBef>
+              <a:spcAft>
+                <a:spcPts val="0"/>
+              </a:spcAft>
             </a:pPr>
             <a:r>
-              <a:rPr sz="1600" b="1" i="0">
+              <a:rPr sz="1600" b="1" i="0" lang="zh-CN" altLang="zh-CN">
                 <a:solidFill>
                   <a:srgbClr val="FFFFFF"/>
                 </a:solidFill>
                 <a:latin typeface="Microsoft YaHei"/>
                 <a:ea typeface="Microsoft YaHei"/>
+                <a:cs typeface="Microsoft YaHei"/>
               </a:rPr>
               <a:t>02</a:t>
             </a:r>
@@ -4074,14 +4214,21 @@
               <a:lnSpc>
                 <a:spcPct val="112000"/>
               </a:lnSpc>
+              <a:spcBef>
+                <a:spcPts val="0"/>
+              </a:spcBef>
+              <a:spcAft>
+                <a:spcPts val="0"/>
+              </a:spcAft>
             </a:pPr>
             <a:r>
-              <a:rPr sz="1700" b="1" i="0">
+              <a:rPr sz="1700" b="1" i="0" lang="zh-CN" altLang="zh-CN">
                 <a:solidFill>
                   <a:srgbClr val="262626"/>
                 </a:solidFill>
                 <a:latin typeface="Microsoft YaHei"/>
                 <a:ea typeface="Microsoft YaHei"/>
+                <a:cs typeface="Microsoft YaHei"/>
               </a:rPr>
               <a:t>数据使能</a:t>
             </a:r>
@@ -4114,14 +4261,21 @@
               <a:lnSpc>
                 <a:spcPct val="112000"/>
               </a:lnSpc>
+              <a:spcBef>
+                <a:spcPts val="0"/>
+              </a:spcBef>
+              <a:spcAft>
+                <a:spcPts val="0"/>
+              </a:spcAft>
             </a:pPr>
             <a:r>
-              <a:rPr sz="1050" b="0" i="0">
+              <a:rPr sz="1050" b="0" i="0" lang="zh-CN" altLang="zh-CN">
                 <a:solidFill>
                   <a:srgbClr val="595959"/>
                 </a:solidFill>
                 <a:latin typeface="Microsoft YaHei"/>
                 <a:ea typeface="Microsoft YaHei"/>
+                <a:cs typeface="Microsoft YaHei"/>
               </a:rPr>
               <a:t>全链路数据工程, 喂饱大模型训练</a:t>
             </a:r>
@@ -4190,14 +4344,21 @@
               <a:lnSpc>
                 <a:spcPct val="130000"/>
               </a:lnSpc>
+              <a:spcBef>
+                <a:spcPts val="0"/>
+              </a:spcBef>
+              <a:spcAft>
+                <a:spcPts val="0"/>
+              </a:spcAft>
             </a:pPr>
             <a:r>
-              <a:rPr sz="1150" b="0" i="0">
+              <a:rPr sz="1150" b="0" i="0" lang="zh-CN" altLang="zh-CN">
                 <a:solidFill>
                   <a:srgbClr val="262626"/>
                 </a:solidFill>
                 <a:latin typeface="Microsoft YaHei"/>
                 <a:ea typeface="Microsoft YaHei"/>
+                <a:cs typeface="Microsoft YaHei"/>
               </a:rPr>
               <a:t>全链路数据工程平台实现 TB 级语料清洗吞吐 2.4GB/s, 多模态自动标注效率提升 3 倍, 脏数据召回率达 99.2%。数据血缘全程可溯, 合规审计覆盖率 100%, 语料以每周 1.2TB 的速度持续入湖, 为大模型训练提供稳定供给。</a:t>
             </a:r>
@@ -4244,7 +4405,14 @@
           <a:bodyPr rtlCol="0" anchor="ctr"/>
           <a:lstStyle/>
           <a:p>
-            <a:pPr algn="ctr"/>
+            <a:pPr algn="ctr">
+              <a:spcBef>
+                <a:spcPts val="0"/>
+              </a:spcBef>
+              <a:spcAft>
+                <a:spcPts val="0"/>
+              </a:spcAft>
+            </a:pPr>
           </a:p>
         </p:txBody>
       </p:sp>
@@ -4274,14 +4442,21 @@
               <a:lnSpc>
                 <a:spcPct val="112000"/>
               </a:lnSpc>
+              <a:spcBef>
+                <a:spcPts val="0"/>
+              </a:spcBef>
+              <a:spcAft>
+                <a:spcPts val="0"/>
+              </a:spcAft>
             </a:pPr>
             <a:r>
-              <a:rPr sz="1250" b="1" i="0">
+              <a:rPr sz="1250" b="1" i="0" lang="zh-CN" altLang="zh-CN">
                 <a:solidFill>
                   <a:srgbClr val="262626"/>
                 </a:solidFill>
                 <a:latin typeface="Microsoft YaHei"/>
                 <a:ea typeface="Microsoft YaHei"/>
+                <a:cs typeface="Microsoft YaHei"/>
               </a:rPr>
               <a:t>标注效率 ×3</a:t>
             </a:r>
@@ -4314,14 +4489,21 @@
               <a:lnSpc>
                 <a:spcPct val="112000"/>
               </a:lnSpc>
+              <a:spcBef>
+                <a:spcPts val="0"/>
+              </a:spcBef>
+              <a:spcAft>
+                <a:spcPts val="0"/>
+              </a:spcAft>
             </a:pPr>
             <a:r>
-              <a:rPr sz="950" b="0" i="0">
+              <a:rPr sz="950" b="0" i="0" lang="zh-CN" altLang="zh-CN">
                 <a:solidFill>
                   <a:srgbClr val="595959"/>
                 </a:solidFill>
                 <a:latin typeface="Microsoft YaHei"/>
                 <a:ea typeface="Microsoft YaHei"/>
+                <a:cs typeface="Microsoft YaHei"/>
               </a:rPr>
               <a:t>典型局点: 千亿模型语料工程全流程</a:t>
             </a:r>
@@ -4368,7 +4550,14 @@
           <a:bodyPr rtlCol="0" anchor="ctr"/>
           <a:lstStyle/>
           <a:p>
-            <a:pPr algn="ctr"/>
+            <a:pPr algn="ctr">
+              <a:spcBef>
+                <a:spcPts val="0"/>
+              </a:spcBef>
+              <a:spcAft>
+                <a:spcPts val="0"/>
+              </a:spcAft>
+            </a:pPr>
           </a:p>
         </p:txBody>
       </p:sp>
@@ -4414,7 +4603,14 @@
           <a:bodyPr rtlCol="0" anchor="ctr"/>
           <a:lstStyle/>
           <a:p>
-            <a:pPr algn="ctr"/>
+            <a:pPr algn="ctr">
+              <a:spcBef>
+                <a:spcPts val="0"/>
+              </a:spcBef>
+              <a:spcAft>
+                <a:spcPts val="0"/>
+              </a:spcAft>
+            </a:pPr>
           </a:p>
         </p:txBody>
       </p:sp>
@@ -4460,7 +4656,14 @@
           <a:bodyPr rtlCol="0" anchor="ctr"/>
           <a:lstStyle/>
           <a:p>
-            <a:pPr algn="ctr"/>
+            <a:pPr algn="ctr">
+              <a:spcBef>
+                <a:spcPts val="0"/>
+              </a:spcBef>
+              <a:spcAft>
+                <a:spcPts val="0"/>
+              </a:spcAft>
+            </a:pPr>
           </a:p>
         </p:txBody>
       </p:sp>
@@ -4506,7 +4709,14 @@
           <a:bodyPr rtlCol="0" anchor="ctr"/>
           <a:lstStyle/>
           <a:p>
-            <a:pPr algn="ctr"/>
+            <a:pPr algn="ctr">
+              <a:spcBef>
+                <a:spcPts val="0"/>
+              </a:spcBef>
+              <a:spcAft>
+                <a:spcPts val="0"/>
+              </a:spcAft>
+            </a:pPr>
           </a:p>
         </p:txBody>
       </p:sp>
@@ -4536,14 +4746,21 @@
               <a:lnSpc>
                 <a:spcPct val="112000"/>
               </a:lnSpc>
+              <a:spcBef>
+                <a:spcPts val="0"/>
+              </a:spcBef>
+              <a:spcAft>
+                <a:spcPts val="0"/>
+              </a:spcAft>
             </a:pPr>
             <a:r>
-              <a:rPr sz="1000" b="0" i="0">
+              <a:rPr sz="1000" b="0" i="0" lang="zh-CN" altLang="zh-CN">
                 <a:solidFill>
                   <a:srgbClr val="595959"/>
                 </a:solidFill>
                 <a:latin typeface="Microsoft YaHei"/>
                 <a:ea typeface="Microsoft YaHei"/>
+                <a:cs typeface="Microsoft YaHei"/>
               </a:rPr>
               <a:t>原始语料自动完成清洗-去重-标注流水线, 工程师聚焦高价值样本治理</a:t>
             </a:r>
@@ -4630,7 +4847,14 @@
           <a:bodyPr rtlCol="0" anchor="ctr"/>
           <a:lstStyle/>
           <a:p>
-            <a:pPr algn="ctr"/>
+            <a:pPr algn="ctr">
+              <a:spcBef>
+                <a:spcPts val="0"/>
+              </a:spcBef>
+              <a:spcAft>
+                <a:spcPts val="0"/>
+              </a:spcAft>
+            </a:pPr>
           </a:p>
         </p:txBody>
       </p:sp>
@@ -4674,7 +4898,14 @@
           <a:bodyPr rtlCol="0" anchor="ctr"/>
           <a:lstStyle/>
           <a:p>
-            <a:pPr algn="ctr"/>
+            <a:pPr algn="ctr">
+              <a:spcBef>
+                <a:spcPts val="0"/>
+              </a:spcBef>
+              <a:spcAft>
+                <a:spcPts val="0"/>
+              </a:spcAft>
+            </a:pPr>
           </a:p>
         </p:txBody>
       </p:sp>
@@ -4718,7 +4949,14 @@
           <a:bodyPr rtlCol="0" anchor="ctr"/>
           <a:lstStyle/>
           <a:p>
-            <a:pPr algn="ctr"/>
+            <a:pPr algn="ctr">
+              <a:spcBef>
+                <a:spcPts val="0"/>
+              </a:spcBef>
+              <a:spcAft>
+                <a:spcPts val="0"/>
+              </a:spcAft>
+            </a:pPr>
           </a:p>
         </p:txBody>
       </p:sp>
@@ -4748,14 +4986,21 @@
               <a:lnSpc>
                 <a:spcPct val="112000"/>
               </a:lnSpc>
+              <a:spcBef>
+                <a:spcPts val="0"/>
+              </a:spcBef>
+              <a:spcAft>
+                <a:spcPts val="0"/>
+              </a:spcAft>
             </a:pPr>
             <a:r>
-              <a:rPr sz="1600" b="1" i="0">
+              <a:rPr sz="1600" b="1" i="0" lang="zh-CN" altLang="zh-CN">
                 <a:solidFill>
                   <a:srgbClr val="FFFFFF"/>
                 </a:solidFill>
                 <a:latin typeface="Microsoft YaHei"/>
                 <a:ea typeface="Microsoft YaHei"/>
+                <a:cs typeface="Microsoft YaHei"/>
               </a:rPr>
               <a:t>03</a:t>
             </a:r>
@@ -4788,14 +5033,21 @@
               <a:lnSpc>
                 <a:spcPct val="112000"/>
               </a:lnSpc>
+              <a:spcBef>
+                <a:spcPts val="0"/>
+              </a:spcBef>
+              <a:spcAft>
+                <a:spcPts val="0"/>
+              </a:spcAft>
             </a:pPr>
             <a:r>
-              <a:rPr sz="1700" b="1" i="0">
+              <a:rPr sz="1700" b="1" i="0" lang="zh-CN" altLang="zh-CN">
                 <a:solidFill>
                   <a:srgbClr val="262626"/>
                 </a:solidFill>
                 <a:latin typeface="Microsoft YaHei"/>
                 <a:ea typeface="Microsoft YaHei"/>
+                <a:cs typeface="Microsoft YaHei"/>
               </a:rPr>
               <a:t>云边协同</a:t>
             </a:r>
@@ -4828,14 +5080,21 @@
               <a:lnSpc>
                 <a:spcPct val="112000"/>
               </a:lnSpc>
+              <a:spcBef>
+                <a:spcPts val="0"/>
+              </a:spcBef>
+              <a:spcAft>
+                <a:spcPts val="0"/>
+              </a:spcAft>
             </a:pPr>
             <a:r>
-              <a:rPr sz="1050" b="0" i="0">
+              <a:rPr sz="1050" b="0" i="0" lang="zh-CN" altLang="zh-CN">
                 <a:solidFill>
                   <a:srgbClr val="595959"/>
                 </a:solidFill>
                 <a:latin typeface="Microsoft YaHei"/>
                 <a:ea typeface="Microsoft YaHei"/>
+                <a:cs typeface="Microsoft YaHei"/>
               </a:rPr>
               <a:t>训推一体调度, 云边端无缝流转</a:t>
             </a:r>
@@ -4886,8 +5145,8 @@
         </p:nvSpPr>
         <p:spPr>
           <a:xfrm>
-            <a:off x="6388100" y="2273300"/>
-            <a:ext cx="2336800" cy="1333500"/>
+            <a:off x="6388100" y="2256536"/>
+            <a:ext cx="2336800" cy="1367028"/>
           </a:xfrm>
           <a:prstGeom prst="rect">
             <a:avLst/>
@@ -4904,14 +5163,21 @@
               <a:lnSpc>
                 <a:spcPct val="130000"/>
               </a:lnSpc>
+              <a:spcBef>
+                <a:spcPts val="0"/>
+              </a:spcBef>
+              <a:spcAft>
+                <a:spcPts val="0"/>
+              </a:spcAft>
             </a:pPr>
             <a:r>
-              <a:rPr sz="1150" b="0" i="0">
+              <a:rPr sz="1150" b="0" i="0" lang="zh-CN" altLang="zh-CN">
                 <a:solidFill>
                   <a:srgbClr val="262626"/>
                 </a:solidFill>
                 <a:latin typeface="Microsoft YaHei"/>
                 <a:ea typeface="Microsoft YaHei"/>
+                <a:cs typeface="Microsoft YaHei"/>
               </a:rPr>
               <a:t>训推一体调度平台支持一键下发 3000 余个边缘节点, 增量更新包压缩 80%, 配置变更分钟级生效。边缘推理时延稳定低于 20ms, 业务 SLA 达标率 99.9%, 云边模型版本自动对齐, 保障规模化部署下的体验一致性。</a:t>
             </a:r>
@@ -4958,7 +5224,14 @@
           <a:bodyPr rtlCol="0" anchor="ctr"/>
           <a:lstStyle/>
           <a:p>
-            <a:pPr algn="ctr"/>
+            <a:pPr algn="ctr">
+              <a:spcBef>
+                <a:spcPts val="0"/>
+              </a:spcBef>
+              <a:spcAft>
+                <a:spcPts val="0"/>
+              </a:spcAft>
+            </a:pPr>
           </a:p>
         </p:txBody>
       </p:sp>
@@ -4988,14 +5261,21 @@
               <a:lnSpc>
                 <a:spcPct val="112000"/>
               </a:lnSpc>
+              <a:spcBef>
+                <a:spcPts val="0"/>
+              </a:spcBef>
+              <a:spcAft>
+                <a:spcPts val="0"/>
+              </a:spcAft>
             </a:pPr>
             <a:r>
-              <a:rPr sz="1250" b="1" i="0">
+              <a:rPr sz="1250" b="1" i="0" lang="zh-CN" altLang="zh-CN">
                 <a:solidFill>
                   <a:srgbClr val="262626"/>
                 </a:solidFill>
                 <a:latin typeface="Microsoft YaHei"/>
                 <a:ea typeface="Microsoft YaHei"/>
+                <a:cs typeface="Microsoft YaHei"/>
               </a:rPr>
               <a:t>推理时延 &lt;20ms</a:t>
             </a:r>
@@ -5028,14 +5308,21 @@
               <a:lnSpc>
                 <a:spcPct val="112000"/>
               </a:lnSpc>
+              <a:spcBef>
+                <a:spcPts val="0"/>
+              </a:spcBef>
+              <a:spcAft>
+                <a:spcPts val="0"/>
+              </a:spcAft>
             </a:pPr>
             <a:r>
-              <a:rPr sz="950" b="0" i="0">
+              <a:rPr sz="950" b="0" i="0" lang="zh-CN" altLang="zh-CN">
                 <a:solidFill>
                   <a:srgbClr val="595959"/>
                 </a:solidFill>
                 <a:latin typeface="Microsoft YaHei"/>
                 <a:ea typeface="Microsoft YaHei"/>
+                <a:cs typeface="Microsoft YaHei"/>
               </a:rPr>
               <a:t>典型局点: 制造质检 3000+ 边缘节点</a:t>
             </a:r>
@@ -5082,7 +5369,14 @@
           <a:bodyPr rtlCol="0" anchor="ctr"/>
           <a:lstStyle/>
           <a:p>
-            <a:pPr algn="ctr"/>
+            <a:pPr algn="ctr">
+              <a:spcBef>
+                <a:spcPts val="0"/>
+              </a:spcBef>
+              <a:spcAft>
+                <a:spcPts val="0"/>
+              </a:spcAft>
+            </a:pPr>
           </a:p>
         </p:txBody>
       </p:sp>
@@ -5094,8 +5388,8 @@
         </p:nvSpPr>
         <p:spPr>
           <a:xfrm>
-            <a:off x="6438900" y="4776354"/>
-            <a:ext cx="355600" cy="355600"/>
+            <a:off x="6353937" y="4674500"/>
+            <a:ext cx="525526" cy="559308"/>
           </a:xfrm>
           <a:prstGeom prst="rect">
             <a:avLst/>
@@ -5112,14 +5406,21 @@
               <a:lnSpc>
                 <a:spcPct val="112000"/>
               </a:lnSpc>
+              <a:spcBef>
+                <a:spcPts val="0"/>
+              </a:spcBef>
+              <a:spcAft>
+                <a:spcPts val="0"/>
+              </a:spcAft>
             </a:pPr>
             <a:r>
-              <a:rPr sz="3400" b="1" i="0">
+              <a:rPr sz="3400" b="1" i="0" lang="zh-CN" altLang="zh-CN">
                 <a:solidFill>
                   <a:srgbClr val="1F4E79"/>
                 </a:solidFill>
                 <a:latin typeface="Microsoft YaHei"/>
                 <a:ea typeface="Microsoft YaHei"/>
+                <a:cs typeface="Microsoft YaHei"/>
               </a:rPr>
               <a:t>☁</a:t>
             </a:r>
@@ -5152,14 +5453,21 @@
               <a:lnSpc>
                 <a:spcPct val="112000"/>
               </a:lnSpc>
+              <a:spcBef>
+                <a:spcPts val="0"/>
+              </a:spcBef>
+              <a:spcAft>
+                <a:spcPts val="0"/>
+              </a:spcAft>
             </a:pPr>
             <a:r>
-              <a:rPr sz="1000" b="0" i="0">
+              <a:rPr sz="1000" b="0" i="0" lang="zh-CN" altLang="zh-CN">
                 <a:solidFill>
                   <a:srgbClr val="595959"/>
                 </a:solidFill>
                 <a:latin typeface="Microsoft YaHei"/>
                 <a:ea typeface="Microsoft YaHei"/>
+                <a:cs typeface="Microsoft YaHei"/>
               </a:rPr>
               <a:t>园区质检相机就地推理, 异常帧秒级上云复核, 回传带宽成本明显下降</a:t>
             </a:r>
@@ -5246,7 +5554,14 @@
           <a:bodyPr rtlCol="0" anchor="ctr"/>
           <a:lstStyle/>
           <a:p>
-            <a:pPr algn="ctr"/>
+            <a:pPr algn="ctr">
+              <a:spcBef>
+                <a:spcPts val="0"/>
+              </a:spcBef>
+              <a:spcAft>
+                <a:spcPts val="0"/>
+              </a:spcAft>
+            </a:pPr>
           </a:p>
         </p:txBody>
       </p:sp>
@@ -5290,7 +5605,14 @@
           <a:bodyPr rtlCol="0" anchor="ctr"/>
           <a:lstStyle/>
           <a:p>
-            <a:pPr algn="ctr"/>
+            <a:pPr algn="ctr">
+              <a:spcBef>
+                <a:spcPts val="0"/>
+              </a:spcBef>
+              <a:spcAft>
+                <a:spcPts val="0"/>
+              </a:spcAft>
+            </a:pPr>
           </a:p>
         </p:txBody>
       </p:sp>
@@ -5334,7 +5656,14 @@
           <a:bodyPr rtlCol="0" anchor="ctr"/>
           <a:lstStyle/>
           <a:p>
-            <a:pPr algn="ctr"/>
+            <a:pPr algn="ctr">
+              <a:spcBef>
+                <a:spcPts val="0"/>
+              </a:spcBef>
+              <a:spcAft>
+                <a:spcPts val="0"/>
+              </a:spcAft>
+            </a:pPr>
           </a:p>
         </p:txBody>
       </p:sp>
@@ -5364,14 +5693,21 @@
               <a:lnSpc>
                 <a:spcPct val="112000"/>
               </a:lnSpc>
+              <a:spcBef>
+                <a:spcPts val="0"/>
+              </a:spcBef>
+              <a:spcAft>
+                <a:spcPts val="0"/>
+              </a:spcAft>
             </a:pPr>
             <a:r>
-              <a:rPr sz="1600" b="1" i="0">
+              <a:rPr sz="1600" b="1" i="0" lang="zh-CN" altLang="zh-CN">
                 <a:solidFill>
                   <a:srgbClr val="FFFFFF"/>
                 </a:solidFill>
                 <a:latin typeface="Microsoft YaHei"/>
                 <a:ea typeface="Microsoft YaHei"/>
+                <a:cs typeface="Microsoft YaHei"/>
               </a:rPr>
               <a:t>04</a:t>
             </a:r>
@@ -5404,14 +5740,21 @@
               <a:lnSpc>
                 <a:spcPct val="112000"/>
               </a:lnSpc>
+              <a:spcBef>
+                <a:spcPts val="0"/>
+              </a:spcBef>
+              <a:spcAft>
+                <a:spcPts val="0"/>
+              </a:spcAft>
             </a:pPr>
             <a:r>
-              <a:rPr sz="1700" b="1" i="0">
+              <a:rPr sz="1700" b="1" i="0" lang="zh-CN" altLang="zh-CN">
                 <a:solidFill>
                   <a:srgbClr val="262626"/>
                 </a:solidFill>
                 <a:latin typeface="Microsoft YaHei"/>
                 <a:ea typeface="Microsoft YaHei"/>
+                <a:cs typeface="Microsoft YaHei"/>
               </a:rPr>
               <a:t>极致性能</a:t>
             </a:r>
@@ -5444,14 +5787,21 @@
               <a:lnSpc>
                 <a:spcPct val="112000"/>
               </a:lnSpc>
+              <a:spcBef>
+                <a:spcPts val="0"/>
+              </a:spcBef>
+              <a:spcAft>
+                <a:spcPts val="0"/>
+              </a:spcAft>
             </a:pPr>
             <a:r>
-              <a:rPr sz="1050" b="0" i="0">
+              <a:rPr sz="1050" b="0" i="0" lang="zh-CN" altLang="zh-CN">
                 <a:solidFill>
                   <a:srgbClr val="595959"/>
                 </a:solidFill>
                 <a:latin typeface="Microsoft YaHei"/>
                 <a:ea typeface="Microsoft YaHei"/>
+                <a:cs typeface="Microsoft YaHei"/>
               </a:rPr>
               <a:t>软硬协同调优, 释放每一分算力</a:t>
             </a:r>
@@ -5520,14 +5870,21 @@
               <a:lnSpc>
                 <a:spcPct val="130000"/>
               </a:lnSpc>
+              <a:spcBef>
+                <a:spcPts val="0"/>
+              </a:spcBef>
+              <a:spcAft>
+                <a:spcPts val="0"/>
+              </a:spcAft>
             </a:pPr>
             <a:r>
-              <a:rPr sz="1150" b="0" i="0">
+              <a:rPr sz="1150" b="0" i="0" lang="zh-CN" altLang="zh-CN">
                 <a:solidFill>
                   <a:srgbClr val="262626"/>
                 </a:solidFill>
                 <a:latin typeface="Microsoft YaHei"/>
                 <a:ea typeface="Microsoft YaHei"/>
+                <a:cs typeface="Microsoft YaHei"/>
               </a:rPr>
               <a:t>通过图编译融合算子优化, 训练吞吐提升 37%, 通信计算重叠使 MFU 达到 52%, 长序列训练显存占用下降 35%。量化无损压缩使推理成本降低 41%, 首 token 时延下降 48%, 单位算力成本实现年降 30%。</a:t>
             </a:r>
@@ -5574,7 +5931,14 @@
           <a:bodyPr rtlCol="0" anchor="ctr"/>
           <a:lstStyle/>
           <a:p>
-            <a:pPr algn="ctr"/>
+            <a:pPr algn="ctr">
+              <a:spcBef>
+                <a:spcPts val="0"/>
+              </a:spcBef>
+              <a:spcAft>
+                <a:spcPts val="0"/>
+              </a:spcAft>
+            </a:pPr>
           </a:p>
         </p:txBody>
       </p:sp>
@@ -5604,14 +5968,21 @@
               <a:lnSpc>
                 <a:spcPct val="112000"/>
               </a:lnSpc>
+              <a:spcBef>
+                <a:spcPts val="0"/>
+              </a:spcBef>
+              <a:spcAft>
+                <a:spcPts val="0"/>
+              </a:spcAft>
             </a:pPr>
             <a:r>
-              <a:rPr sz="1250" b="1" i="0">
+              <a:rPr sz="1250" b="1" i="0" lang="zh-CN" altLang="zh-CN">
                 <a:solidFill>
                   <a:srgbClr val="262626"/>
                 </a:solidFill>
                 <a:latin typeface="Microsoft YaHei"/>
                 <a:ea typeface="Microsoft YaHei"/>
+                <a:cs typeface="Microsoft YaHei"/>
               </a:rPr>
               <a:t>MFU 52%</a:t>
             </a:r>
@@ -5644,14 +6015,21 @@
               <a:lnSpc>
                 <a:spcPct val="112000"/>
               </a:lnSpc>
+              <a:spcBef>
+                <a:spcPts val="0"/>
+              </a:spcBef>
+              <a:spcAft>
+                <a:spcPts val="0"/>
+              </a:spcAft>
             </a:pPr>
             <a:r>
-              <a:rPr sz="950" b="0" i="0">
+              <a:rPr sz="950" b="0" i="0" lang="zh-CN" altLang="zh-CN">
                 <a:solidFill>
                   <a:srgbClr val="595959"/>
                 </a:solidFill>
                 <a:latin typeface="Microsoft YaHei"/>
                 <a:ea typeface="Microsoft YaHei"/>
+                <a:cs typeface="Microsoft YaHei"/>
               </a:rPr>
               <a:t>典型局点: 盘古大模型训推全链路调优</a:t>
             </a:r>
@@ -5698,7 +6076,14 @@
           <a:bodyPr rtlCol="0" anchor="ctr"/>
           <a:lstStyle/>
           <a:p>
-            <a:pPr algn="ctr"/>
+            <a:pPr algn="ctr">
+              <a:spcBef>
+                <a:spcPts val="0"/>
+              </a:spcBef>
+              <a:spcAft>
+                <a:spcPts val="0"/>
+              </a:spcAft>
+            </a:pPr>
           </a:p>
         </p:txBody>
       </p:sp>
@@ -5710,8 +6095,8 @@
         </p:nvSpPr>
         <p:spPr>
           <a:xfrm>
-            <a:off x="9359900" y="4784436"/>
-            <a:ext cx="355600" cy="355600"/>
+            <a:off x="9202737" y="4706267"/>
+            <a:ext cx="669925" cy="511937"/>
           </a:xfrm>
           <a:prstGeom prst="rect">
             <a:avLst/>
@@ -5728,14 +6113,21 @@
               <a:lnSpc>
                 <a:spcPct val="112000"/>
               </a:lnSpc>
+              <a:spcBef>
+                <a:spcPts val="0"/>
+              </a:spcBef>
+              <a:spcAft>
+                <a:spcPts val="0"/>
+              </a:spcAft>
             </a:pPr>
             <a:r>
-              <a:rPr sz="3100" b="1" i="0">
+              <a:rPr sz="3100" b="1" i="0" lang="zh-CN" altLang="zh-CN">
                 <a:solidFill>
                   <a:srgbClr val="1F4E79"/>
                 </a:solidFill>
                 <a:latin typeface="Microsoft YaHei"/>
                 <a:ea typeface="Microsoft YaHei"/>
+                <a:cs typeface="Microsoft YaHei"/>
               </a:rPr>
               <a:t>⚡</a:t>
             </a:r>
@@ -5768,14 +6160,21 @@
               <a:lnSpc>
                 <a:spcPct val="112000"/>
               </a:lnSpc>
+              <a:spcBef>
+                <a:spcPts val="0"/>
+              </a:spcBef>
+              <a:spcAft>
+                <a:spcPts val="0"/>
+              </a:spcAft>
             </a:pPr>
             <a:r>
-              <a:rPr sz="1000" b="0" i="0">
+              <a:rPr sz="1000" b="0" i="0" lang="zh-CN" altLang="zh-CN">
                 <a:solidFill>
                   <a:srgbClr val="595959"/>
                 </a:solidFill>
                 <a:latin typeface="Microsoft YaHei"/>
                 <a:ea typeface="Microsoft YaHei"/>
+                <a:cs typeface="Microsoft YaHei"/>
               </a:rPr>
               <a:t>同一套模型在训练集群与边缘设备间无缝迁移, 调优收益全链路放大</a:t>
             </a:r>
@@ -5822,7 +6221,14 @@
           <a:bodyPr rtlCol="0" anchor="ctr"/>
           <a:lstStyle/>
           <a:p>
-            <a:pPr algn="ctr"/>
+            <a:pPr algn="ctr">
+              <a:spcBef>
+                <a:spcPts val="0"/>
+              </a:spcBef>
+              <a:spcAft>
+                <a:spcPts val="0"/>
+              </a:spcAft>
+            </a:pPr>
           </a:p>
         </p:txBody>
       </p:sp>
@@ -5866,7 +6272,14 @@
           <a:bodyPr rtlCol="0" anchor="ctr"/>
           <a:lstStyle/>
           <a:p>
-            <a:pPr algn="ctr"/>
+            <a:pPr algn="ctr">
+              <a:spcBef>
+                <a:spcPts val="0"/>
+              </a:spcBef>
+              <a:spcAft>
+                <a:spcPts val="0"/>
+              </a:spcAft>
+            </a:pPr>
           </a:p>
         </p:txBody>
       </p:sp>
@@ -5896,14 +6309,21 @@
               <a:lnSpc>
                 <a:spcPct val="112000"/>
               </a:lnSpc>
+              <a:spcBef>
+                <a:spcPts val="0"/>
+              </a:spcBef>
+              <a:spcAft>
+                <a:spcPts val="0"/>
+              </a:spcAft>
             </a:pPr>
             <a:r>
-              <a:rPr sz="1400" b="1" i="0">
+              <a:rPr sz="1400" b="1" i="0" lang="zh-CN" altLang="zh-CN">
                 <a:solidFill>
                   <a:srgbClr val="262626"/>
                 </a:solidFill>
                 <a:latin typeface="Microsoft YaHei"/>
                 <a:ea typeface="Microsoft YaHei"/>
+                <a:cs typeface="Microsoft YaHei"/>
               </a:rPr>
               <a:t>四大能力环环相扣, 构筑自主可控 AI 算力底座, 支撑盘古大模型迭代周期从 3 个月压缩至 6 周</a:t>
             </a:r>
@@ -5950,7 +6370,14 @@
           <a:bodyPr rtlCol="0" anchor="ctr"/>
           <a:lstStyle/>
           <a:p>
-            <a:pPr algn="ctr"/>
+            <a:pPr algn="ctr">
+              <a:spcBef>
+                <a:spcPts val="0"/>
+              </a:spcBef>
+              <a:spcAft>
+                <a:spcPts val="0"/>
+              </a:spcAft>
+            </a:pPr>
           </a:p>
         </p:txBody>
       </p:sp>
@@ -5980,14 +6407,21 @@
               <a:lnSpc>
                 <a:spcPct val="112000"/>
               </a:lnSpc>
+              <a:spcBef>
+                <a:spcPts val="0"/>
+              </a:spcBef>
+              <a:spcAft>
+                <a:spcPts val="0"/>
+              </a:spcAft>
             </a:pPr>
             <a:r>
-              <a:rPr sz="1400" b="1" i="0">
+              <a:rPr sz="1400" b="1" i="0" lang="zh-CN" altLang="zh-CN">
                 <a:solidFill>
                   <a:srgbClr val="262626"/>
                 </a:solidFill>
                 <a:latin typeface="Microsoft YaHei"/>
                 <a:ea typeface="Microsoft YaHei"/>
+                <a:cs typeface="Microsoft YaHei"/>
               </a:rPr>
               <a:t>训练效率 +45%</a:t>
             </a:r>
